--- a/documentation/posters/Smart_UTM_poster_A4.pptx
+++ b/documentation/posters/Smart_UTM_poster_A4.pptx
@@ -3731,7 +3731,7 @@
                 </a:solidFill>
                 <a:latin typeface="Calibri"/>
               </a:rPr>
-              <a:t>17</a:t>
+              <a:t>34</a:t>
             </a:r>
           </a:p>
         </p:txBody>
@@ -3792,7 +3792,7 @@
                 </a:solidFill>
                 <a:latin typeface="Calibri"/>
               </a:rPr>
-              <a:t>13 specimens</a:t>
+              <a:t>29 specimens</a:t>
             </a:r>
           </a:p>
         </p:txBody>
@@ -4331,7 +4331,7 @@
                 </a:solidFill>
                 <a:latin typeface="Calibri"/>
               </a:rPr>
-              <a:t>Code, raw CSVs and the full 76-slide technical deck: Software/UTM_PyQt6/ and documentation/  ·  Every figure and number here is regenerated from the rig CSVs by documentation/sf9_data.py — none of it is transcribed by hand.  ·  Layout follows the #evenbetterposter / Generation-2 billboard format: a plain-language headline, with methods and limitations kept as full panels rather than sidebars.</a:t>
+              <a:t>Code, raw CSVs and the full 76-slide technical deck: Software/UTM_PyQt6/ and documentation/  ·  Every figure and number here is regenerated from the rig CSVs by documentation/scripts/sf9_data.py — none of it is transcribed by hand.  ·  Layout follows the #evenbetterposter / Generation-2 billboard format: a plain-language headline, with methods and limitations kept as full panels rather than sidebars.</a:t>
             </a:r>
           </a:p>
         </p:txBody>
@@ -5683,7 +5683,7 @@
                 </a:solidFill>
                 <a:latin typeface="Calibri"/>
               </a:rPr>
-              <a:t>THE SMART FEATURES, SF1 TO SF16</a:t>
+              <a:t>THE SMART FEATURES, SF1 TO SF15</a:t>
             </a:r>
           </a:p>
         </p:txBody>
@@ -9909,7 +9909,7 @@
                 </a:solidFill>
                 <a:latin typeface="Calibri"/>
               </a:rPr>
-              <a:t>Test registry — 17 runs</a:t>
+              <a:t>Test registry — 34 runs</a:t>
             </a:r>
           </a:p>
         </p:txBody>
